--- a/8주차/简体中文/游戏引擎基础_第8周_实操与作业指南_简体中文.pptx
+++ b/8주차/简体中文/游戏引擎基础_第8周_实操与作业指南_简体中文.pptx
@@ -146,12 +146,12 @@
   <p:extLst>
     <p:ext uri="{521415D9-36F7-43E2-AB2F-B90AF26B5E84}">
       <p14:sectionLst xmlns:p14="http://schemas.microsoft.com/office/powerpoint/2010/main">
-        <p14:section name="开始" id="{edf967ed-564b-0f8e-2d62-1583751fb407}">
+        <p14:section name="开始" id="{d2d0c186-48db-c8f6-ede7-0883253682a2}">
           <p14:sldIdLst>
             <p14:sldId id="256"/>
           </p14:sldIdLst>
         </p14:section>
-        <p14:section name="实操 1" id="{ff763d44-135d-dd40-ef58-9fef7164369c}">
+        <p14:section name="实操 1" id="{96bc8457-b46d-fa17-2e97-3e051eb4c11c}">
           <p14:sldIdLst>
             <p14:sldId id="257"/>
             <p14:sldId id="258"/>
@@ -161,28 +161,28 @@
             <p14:sldId id="262"/>
           </p14:sldIdLst>
         </p14:section>
-        <p14:section name="实操 2" id="{a40efa15-17da-6bb6-d1ec-1757404f3e04}">
+        <p14:section name="实操 2" id="{3332f498-0650-ff16-579f-9d4197d93490}">
           <p14:sldIdLst>
             <p14:sldId id="263"/>
             <p14:sldId id="264"/>
             <p14:sldId id="265"/>
           </p14:sldIdLst>
         </p14:section>
-        <p14:section name="实操 3" id="{39502f2b-db78-2751-82b9-4784683bb16e}">
+        <p14:section name="实操 3" id="{b6d58348-0c2e-e8c3-e9ff-a2db4b69c2e0}">
           <p14:sldIdLst>
             <p14:sldId id="266"/>
             <p14:sldId id="267"/>
             <p14:sldId id="268"/>
           </p14:sldIdLst>
         </p14:section>
-        <p14:section name="实操 4" id="{78c12d76-2350-893c-ad5e-c23b44661b97}">
+        <p14:section name="实操 4" id="{f410d556-1314-23c7-f0e0-2d4bbd2cd33a}">
           <p14:sldIdLst>
             <p14:sldId id="269"/>
             <p14:sldId id="270"/>
             <p14:sldId id="271"/>
           </p14:sldIdLst>
         </p14:section>
-        <p14:section name="实操 5" id="{eaddd22c-1254-a625-73e2-45d75a560ce3}">
+        <p14:section name="实操 5" id="{ddef55ca-df1d-45c9-9686-894bd46392c8}">
           <p14:sldIdLst>
             <p14:sldId id="272"/>
             <p14:sldId id="273"/>
@@ -191,13 +191,13 @@
             <p14:sldId id="276"/>
           </p14:sldIdLst>
         </p14:section>
-        <p14:section name="实操 6" id="{91d21af2-3832-0da7-14a7-b67f248fb6fc}">
+        <p14:section name="实操 6" id="{f1b78ea9-6028-435e-a98d-fc6c4ae61aa6}">
           <p14:sldIdLst>
             <p14:sldId id="277"/>
             <p14:sldId id="278"/>
           </p14:sldIdLst>
         </p14:section>
-        <p14:section name="实操 7" id="{8751dd56-9714-bd52-de5a-da7a701d615d}">
+        <p14:section name="实操 7" id="{4462e2c8-c65a-a19f-81ab-46de346789b3}">
           <p14:sldIdLst>
             <p14:sldId id="279"/>
             <p14:sldId id="280"/>
@@ -209,13 +209,13 @@
             <p14:sldId id="286"/>
           </p14:sldIdLst>
         </p14:section>
-        <p14:section name="收尾" id="{c69c5b06-ec60-260f-2209-79dee762059d}">
+        <p14:section name="收尾" id="{fe44796d-0f89-d757-af33-370462de691c}">
           <p14:sldIdLst>
             <p14:sldId id="287"/>
             <p14:sldId id="288"/>
           </p14:sldIdLst>
         </p14:section>
-        <p14:section name="作业" id="{1d4af599-7175-5a7f-5d55-77350c87a69e}">
+        <p14:section name="作业" id="{cb2d186d-e23c-bd9e-24d5-9791e7684cf1}">
           <p14:sldIdLst>
             <p14:sldId id="289"/>
             <p14:sldId id="290"/>
@@ -5434,8 +5434,8 @@
         </p:nvSpPr>
         <p:spPr>
           <a:xfrm>
-            <a:off x="731520" y="1920240"/>
-            <a:ext cx="7498080" cy="822960"/>
+            <a:off x="731520" y="1783080"/>
+            <a:ext cx="7498080" cy="731520"/>
           </a:xfrm>
           <a:prstGeom prst="rect">
             <a:avLst/>
@@ -5454,7 +5454,7 @@
               <a:buNone/>
             </a:pPr>
             <a:r>
-              <a:rPr lang="en-US" sz="4000" b="1" dirty="0">
+              <a:rPr lang="en-US" sz="3600" b="1" dirty="0">
                 <a:solidFill>
                   <a:srgbClr val="FFFFFF"/>
                 </a:solidFill>
@@ -5462,9 +5462,9 @@
                 <a:ea typeface="Noto Sans SC" pitchFamily="34" charset="-122"/>
                 <a:cs typeface="Noto Sans SC" pitchFamily="34" charset="-120"/>
               </a:rPr>
-              <a:t>期末项目开始</a:t>
-            </a:r>
-            <a:endParaRPr lang="en-US" sz="4000" dirty="0"/>
+              <a:t>从今天开始。</a:t>
+            </a:r>
+            <a:endParaRPr lang="en-US" sz="3600" dirty="0"/>
           </a:p>
         </p:txBody>
       </p:sp>
@@ -5476,8 +5476,8 @@
         </p:nvSpPr>
         <p:spPr>
           <a:xfrm>
-            <a:off x="731520" y="2697480"/>
-            <a:ext cx="7498080" cy="822960"/>
+            <a:off x="731520" y="2514600"/>
+            <a:ext cx="7315200" cy="1188720"/>
           </a:xfrm>
           <a:prstGeom prst="rect">
             <a:avLst/>
@@ -5491,12 +5491,12 @@
           <a:p>
             <a:pPr algn="l" indent="0" marL="0">
               <a:lnSpc>
-                <a:spcPct val="115000"/>
-              </a:lnSpc>
-              <a:buNone/>
-            </a:pPr>
-            <a:r>
-              <a:rPr lang="en-US" sz="4000" b="1" dirty="0">
+                <a:spcPct val="105000"/>
+              </a:lnSpc>
+              <a:buNone/>
+            </a:pPr>
+            <a:r>
+              <a:rPr lang="en-US" sz="3000" b="1" dirty="0">
                 <a:solidFill>
                   <a:srgbClr val="E07A2E"/>
                 </a:solidFill>
@@ -5504,9 +5504,29 @@
                 <a:ea typeface="Noto Sans SC" pitchFamily="34" charset="-122"/>
                 <a:cs typeface="Noto Sans SC" pitchFamily="34" charset="-120"/>
               </a:rPr>
-              <a:t>和 AI 策划 · 主视觉 · 素材</a:t>
-            </a:r>
-            <a:endParaRPr lang="en-US" sz="4000" dirty="0"/>
+              <a:t>用 AI 和素材</a:t>
+            </a:r>
+            <a:endParaRPr lang="en-US" sz="3000" dirty="0"/>
+          </a:p>
+          <a:p>
+            <a:pPr algn="l" indent="0" marL="0">
+              <a:lnSpc>
+                <a:spcPct val="105000"/>
+              </a:lnSpc>
+              <a:buNone/>
+            </a:pPr>
+            <a:r>
+              <a:rPr lang="en-US" sz="3000" b="1" dirty="0">
+                <a:solidFill>
+                  <a:srgbClr val="E07A2E"/>
+                </a:solidFill>
+                <a:latin typeface="Noto Sans SC" pitchFamily="34" charset="0"/>
+                <a:ea typeface="Noto Sans SC" pitchFamily="34" charset="-122"/>
+                <a:cs typeface="Noto Sans SC" pitchFamily="34" charset="-120"/>
+              </a:rPr>
+              <a:t>花一个月做一款游戏</a:t>
+            </a:r>
+            <a:endParaRPr lang="en-US" sz="3000" dirty="0"/>
           </a:p>
         </p:txBody>
       </p:sp>
@@ -5518,7 +5538,7 @@
         </p:nvSpPr>
         <p:spPr>
           <a:xfrm>
-            <a:off x="731520" y="3657600"/>
+            <a:off x="731520" y="3931920"/>
             <a:ext cx="7132320" cy="731520"/>
           </a:xfrm>
           <a:prstGeom prst="rect">
@@ -5538,7 +5558,7 @@
               <a:buNone/>
             </a:pPr>
             <a:r>
-              <a:rPr lang="en-US" sz="1700" dirty="0">
+              <a:rPr lang="en-US" sz="1600" dirty="0">
                 <a:solidFill>
                   <a:srgbClr val="D5DBE2"/>
                 </a:solidFill>
@@ -5548,7 +5568,7 @@
               </a:rPr>
               <a:t>和 AI 一起做策划、做主视觉，然后在新项目中让换上素材的玩家动起来</a:t>
             </a:r>
-            <a:endParaRPr lang="en-US" sz="1700" dirty="0"/>
+            <a:endParaRPr lang="en-US" sz="1600" dirty="0"/>
           </a:p>
         </p:txBody>
       </p:sp>
